--- a/docs/Proposal.pptx
+++ b/docs/Proposal.pptx
@@ -5871,14 +5871,14 @@
           <p:nvPr>
             <p:extLst>
               <p:ext uri="{D42A27DB-BD31-4B8C-83A1-F6EECF244321}">
-                <p14:modId xmlns:p14="http://schemas.microsoft.com/office/powerpoint/2010/main" val="3530083775"/>
+                <p14:modId xmlns:p14="http://schemas.microsoft.com/office/powerpoint/2010/main" val="164794077"/>
               </p:ext>
             </p:extLst>
           </p:nvPr>
         </p:nvGraphicFramePr>
         <p:xfrm>
           <a:off x="255494" y="1945666"/>
-          <a:ext cx="8633010" cy="2575560"/>
+          <a:ext cx="8633010" cy="3083560"/>
         </p:xfrm>
         <a:graphic>
           <a:graphicData uri="http://schemas.openxmlformats.org/drawingml/2006/table">
@@ -5887,21 +5887,21 @@
                 <a:tableStyleId>{21E4AEA4-8DFA-4A89-87EB-49C32662AFE0}</a:tableStyleId>
               </a:tblPr>
               <a:tblGrid>
-                <a:gridCol w="2877670">
+                <a:gridCol w="3213847">
                   <a:extLst>
                     <a:ext uri="{9D8B030D-6E8A-4147-A177-3AD203B41FA5}">
                       <a16:colId xmlns:a16="http://schemas.microsoft.com/office/drawing/2014/main" val="2559954828"/>
                     </a:ext>
                   </a:extLst>
                 </a:gridCol>
-                <a:gridCol w="2877670">
+                <a:gridCol w="1586753">
                   <a:extLst>
                     <a:ext uri="{9D8B030D-6E8A-4147-A177-3AD203B41FA5}">
                       <a16:colId xmlns:a16="http://schemas.microsoft.com/office/drawing/2014/main" val="3815424960"/>
                     </a:ext>
                   </a:extLst>
                 </a:gridCol>
-                <a:gridCol w="2877670">
+                <a:gridCol w="3832410">
                   <a:extLst>
                     <a:ext uri="{9D8B030D-6E8A-4147-A177-3AD203B41FA5}">
                       <a16:colId xmlns:a16="http://schemas.microsoft.com/office/drawing/2014/main" val="1520139812"/>
@@ -6042,6 +6042,45 @@
                     <a:lstStyle/>
                     <a:p>
                       <a:pPr algn="ctr"/>
+                      <a:r>
+                        <a:rPr lang="de-AT" sz="1400" b="0" i="0" u="none" strike="noStrike" cap="none" dirty="0">
+                          <a:solidFill>
+                            <a:schemeClr val="dk1"/>
+                          </a:solidFill>
+                          <a:effectLst/>
+                          <a:latin typeface="+mn-lt"/>
+                          <a:ea typeface="+mn-ea"/>
+                          <a:cs typeface="+mn-cs"/>
+                          <a:sym typeface="Arial"/>
+                        </a:rPr>
+                        <a:t>ADC, TDC, LNA, LC-VCO, ReRAM Programmable Analog Blocks, </a:t>
+                      </a:r>
+                      <a:r>
+                        <a:rPr lang="en-US" sz="1400" b="0" i="0" u="none" strike="noStrike" cap="none" dirty="0" err="1">
+                          <a:solidFill>
+                            <a:schemeClr val="dk1"/>
+                          </a:solidFill>
+                          <a:effectLst/>
+                          <a:latin typeface="+mn-lt"/>
+                          <a:ea typeface="+mn-ea"/>
+                          <a:cs typeface="+mn-cs"/>
+                          <a:sym typeface="Arial"/>
+                        </a:rPr>
+                        <a:t>SiC</a:t>
+                      </a:r>
+                      <a:r>
+                        <a:rPr lang="en-US" sz="1400" b="0" i="0" u="none" strike="noStrike" cap="none" dirty="0">
+                          <a:solidFill>
+                            <a:schemeClr val="dk1"/>
+                          </a:solidFill>
+                          <a:effectLst/>
+                          <a:latin typeface="+mn-lt"/>
+                          <a:ea typeface="+mn-ea"/>
+                          <a:cs typeface="+mn-cs"/>
+                          <a:sym typeface="Arial"/>
+                        </a:rPr>
+                        <a:t> Gate Drivers, USB-C, BGR and LDOs</a:t>
+                      </a:r>
                       <a:endParaRPr lang="de-AT" dirty="0"/>
                     </a:p>
                   </a:txBody>
@@ -6088,6 +6127,19 @@
                     <a:lstStyle/>
                     <a:p>
                       <a:pPr algn="ctr"/>
+                      <a:r>
+                        <a:rPr lang="de-AT" sz="1400" b="0" i="0" u="none" strike="noStrike" cap="none" dirty="0">
+                          <a:solidFill>
+                            <a:schemeClr val="dk1"/>
+                          </a:solidFill>
+                          <a:effectLst/>
+                          <a:latin typeface="+mn-lt"/>
+                          <a:ea typeface="+mn-ea"/>
+                          <a:cs typeface="+mn-cs"/>
+                          <a:sym typeface="Arial"/>
+                        </a:rPr>
+                        <a:t>Mixed Signal ICs: 12 Bit 2 GSps Folding Interpolating ADC in IHP SG25H5 EPIC BiCMOS, &amp; 8 Bit SAR ADC in GF 28nm cmoslpe</a:t>
+                      </a:r>
                       <a:endParaRPr lang="de-AT" dirty="0"/>
                     </a:p>
                   </a:txBody>
